--- a/Modelo certificado (editável).pptx
+++ b/Modelo certificado (editável).pptx
@@ -3010,8 +3010,9 @@
             <a:r>
               <a:rPr lang="pt-BR" sz="900" b="0" i="0" dirty="0">
                 <a:effectLst/>
-                <a:latin typeface="Helvetica" panose="020B0604020202020204" pitchFamily="34" charset="0"/>
-                <a:cs typeface="Helvetica" panose="020B0604020202020204" pitchFamily="34" charset="0"/>
+                <a:latin typeface="Open Sans" pitchFamily="2" charset="0"/>
+                <a:ea typeface="Open Sans" pitchFamily="2" charset="0"/>
+                <a:cs typeface="Open Sans" pitchFamily="2" charset="0"/>
               </a:rPr>
               <a:t>TEXTO</a:t>
             </a:r>
@@ -3025,8 +3026,9 @@
             </a:pPr>
             <a:r>
               <a:rPr lang="pt-BR" sz="900" dirty="0">
-                <a:latin typeface="Helvetica" panose="020B0604020202020204" pitchFamily="34" charset="0"/>
-                <a:cs typeface="Helvetica" panose="020B0604020202020204" pitchFamily="34" charset="0"/>
+                <a:latin typeface="Open Sans" pitchFamily="2" charset="0"/>
+                <a:ea typeface="Open Sans" pitchFamily="2" charset="0"/>
+                <a:cs typeface="Open Sans" pitchFamily="2" charset="0"/>
               </a:rPr>
               <a:t>TEXTO</a:t>
             </a:r>
@@ -3041,8 +3043,9 @@
             <a:r>
               <a:rPr lang="pt-BR" sz="900" dirty="0">
                 <a:effectLst/>
-                <a:latin typeface="Helvetica" panose="020B0604020202020204" pitchFamily="34" charset="0"/>
-                <a:cs typeface="Helvetica" panose="020B0604020202020204" pitchFamily="34" charset="0"/>
+                <a:latin typeface="Open Sans" pitchFamily="2" charset="0"/>
+                <a:ea typeface="Open Sans" pitchFamily="2" charset="0"/>
+                <a:cs typeface="Open Sans" pitchFamily="2" charset="0"/>
               </a:rPr>
               <a:t>TEXTO</a:t>
             </a:r>
@@ -3132,15 +3135,17 @@
                   <a:srgbClr val="000000"/>
                 </a:solidFill>
                 <a:effectLst/>
-                <a:latin typeface="Helvetica" panose="020B0604020202020204" pitchFamily="34" charset="0"/>
-                <a:cs typeface="Helvetica" panose="020B0604020202020204" pitchFamily="34" charset="0"/>
+                <a:latin typeface="Open Sans" pitchFamily="2" charset="0"/>
+                <a:ea typeface="Open Sans" pitchFamily="2" charset="0"/>
+                <a:cs typeface="Open Sans" pitchFamily="2" charset="0"/>
               </a:rPr>
               <a:t>NOME</a:t>
             </a:r>
             <a:endParaRPr lang="pt-BR" sz="1400" b="1" cap="all" dirty="0">
               <a:effectLst/>
-              <a:latin typeface="Helvetica" panose="020B0604020202020204" pitchFamily="34" charset="0"/>
-              <a:cs typeface="Helvetica" panose="020B0604020202020204" pitchFamily="34" charset="0"/>
+              <a:latin typeface="Open Sans" pitchFamily="2" charset="0"/>
+              <a:ea typeface="Open Sans" pitchFamily="2" charset="0"/>
+              <a:cs typeface="Open Sans" pitchFamily="2" charset="0"/>
             </a:endParaRPr>
           </a:p>
         </p:txBody>
@@ -3187,8 +3192,9 @@
                   <a:srgbClr val="000000"/>
                 </a:solidFill>
                 <a:effectLst/>
-                <a:latin typeface="Helvetica" panose="020B0604020202020204" pitchFamily="34" charset="0"/>
-                <a:cs typeface="Helvetica" panose="020B0604020202020204" pitchFamily="34" charset="0"/>
+                <a:latin typeface="Open Sans" pitchFamily="2" charset="0"/>
+                <a:ea typeface="Open Sans" pitchFamily="2" charset="0"/>
+                <a:cs typeface="Open Sans" pitchFamily="2" charset="0"/>
               </a:rPr>
               <a:t>Certificado</a:t>
             </a:r>
@@ -3199,8 +3205,9 @@
                 </a:solidFill>
               </a:ln>
               <a:effectLst/>
-              <a:latin typeface="Helvetica" panose="020B0604020202020204" pitchFamily="34" charset="0"/>
-              <a:cs typeface="Helvetica" panose="020B0604020202020204" pitchFamily="34" charset="0"/>
+              <a:latin typeface="Open Sans" pitchFamily="2" charset="0"/>
+              <a:ea typeface="Open Sans" pitchFamily="2" charset="0"/>
+              <a:cs typeface="Open Sans" pitchFamily="2" charset="0"/>
             </a:endParaRPr>
           </a:p>
         </p:txBody>
